--- a/Labs/lab21 audio amplifierTheory/amplifierTheory.pptx
+++ b/Labs/lab21 audio amplifierTheory/amplifierTheory.pptx
@@ -210,7 +210,7 @@
           <a:p>
             <a:fld id="{E4DD5C9C-88A3-CA43-B162-DCC4E1E4BE7D}" type="datetimeFigureOut">
               <a:rPr lang="en-US" smtClean="0"/>
-              <a:t>3/1/2023</a:t>
+              <a:t>1/6/2026</a:t>
             </a:fld>
             <a:endParaRPr lang="en-US"/>
           </a:p>
@@ -375,7 +375,7 @@
           <a:p>
             <a:fld id="{BC5E4000-89B6-4F22-834E-B172C4AA57D1}" type="datetimeFigureOut">
               <a:rPr lang="en-US" smtClean="0"/>
-              <a:t>3/1/2023</a:t>
+              <a:t>1/6/2026</a:t>
             </a:fld>
             <a:endParaRPr lang="en-US"/>
           </a:p>
@@ -1329,7 +1329,7 @@
           <a:p>
             <a:fld id="{8923E60E-3077-9A4D-B784-FBCD6B1A2E3F}" type="datetimeFigureOut">
               <a:rPr lang="en-US" smtClean="0"/>
-              <a:t>3/1/2023</a:t>
+              <a:t>1/6/2026</a:t>
             </a:fld>
             <a:endParaRPr lang="en-US"/>
           </a:p>
@@ -1945,7 +1945,7 @@
           <a:p>
             <a:fld id="{8923E60E-3077-9A4D-B784-FBCD6B1A2E3F}" type="datetimeFigureOut">
               <a:rPr lang="en-US" smtClean="0"/>
-              <a:t>3/1/2023</a:t>
+              <a:t>1/6/2026</a:t>
             </a:fld>
             <a:endParaRPr lang="en-US"/>
           </a:p>
@@ -2422,7 +2422,7 @@
           <a:p>
             <a:fld id="{8923E60E-3077-9A4D-B784-FBCD6B1A2E3F}" type="datetimeFigureOut">
               <a:rPr lang="en-US" smtClean="0"/>
-              <a:t>3/1/2023</a:t>
+              <a:t>1/6/2026</a:t>
             </a:fld>
             <a:endParaRPr lang="en-US"/>
           </a:p>
@@ -2659,7 +2659,7 @@
           <a:p>
             <a:fld id="{8923E60E-3077-9A4D-B784-FBCD6B1A2E3F}" type="datetimeFigureOut">
               <a:rPr lang="en-US" smtClean="0"/>
-              <a:t>3/1/2023</a:t>
+              <a:t>1/6/2026</a:t>
             </a:fld>
             <a:endParaRPr lang="en-US"/>
           </a:p>
@@ -3014,7 +3014,7 @@
           <a:p>
             <a:fld id="{8923E60E-3077-9A4D-B784-FBCD6B1A2E3F}" type="datetimeFigureOut">
               <a:rPr lang="en-US" smtClean="0"/>
-              <a:t>3/1/2023</a:t>
+              <a:t>1/6/2026</a:t>
             </a:fld>
             <a:endParaRPr lang="en-US"/>
           </a:p>
@@ -3481,7 +3481,7 @@
           <a:p>
             <a:fld id="{8923E60E-3077-9A4D-B784-FBCD6B1A2E3F}" type="datetimeFigureOut">
               <a:rPr lang="en-US" smtClean="0"/>
-              <a:t>3/1/2023</a:t>
+              <a:t>1/6/2026</a:t>
             </a:fld>
             <a:endParaRPr lang="en-US"/>
           </a:p>
@@ -3826,7 +3826,7 @@
           <a:p>
             <a:fld id="{8923E60E-3077-9A4D-B784-FBCD6B1A2E3F}" type="datetimeFigureOut">
               <a:rPr lang="en-US" smtClean="0"/>
-              <a:t>3/1/2023</a:t>
+              <a:t>1/6/2026</a:t>
             </a:fld>
             <a:endParaRPr lang="en-US"/>
           </a:p>
@@ -4183,7 +4183,7 @@
           <a:p>
             <a:fld id="{8923E60E-3077-9A4D-B784-FBCD6B1A2E3F}" type="datetimeFigureOut">
               <a:rPr lang="en-US" smtClean="0"/>
-              <a:t>3/1/2023</a:t>
+              <a:t>1/6/2026</a:t>
             </a:fld>
             <a:endParaRPr lang="en-US"/>
           </a:p>
@@ -4724,7 +4724,7 @@
           <a:p>
             <a:fld id="{8923E60E-3077-9A4D-B784-FBCD6B1A2E3F}" type="datetimeFigureOut">
               <a:rPr lang="en-US" smtClean="0"/>
-              <a:t>3/1/2023</a:t>
+              <a:t>1/6/2026</a:t>
             </a:fld>
             <a:endParaRPr lang="en-US"/>
           </a:p>
@@ -5018,7 +5018,7 @@
           <a:p>
             <a:fld id="{8923E60E-3077-9A4D-B784-FBCD6B1A2E3F}" type="datetimeFigureOut">
               <a:rPr lang="en-US" smtClean="0"/>
-              <a:t>3/1/2023</a:t>
+              <a:t>1/6/2026</a:t>
             </a:fld>
             <a:endParaRPr lang="en-US"/>
           </a:p>
@@ -5282,7 +5282,7 @@
           <a:p>
             <a:fld id="{8923E60E-3077-9A4D-B784-FBCD6B1A2E3F}" type="datetimeFigureOut">
               <a:rPr lang="en-US" smtClean="0"/>
-              <a:t>3/1/2023</a:t>
+              <a:t>1/6/2026</a:t>
             </a:fld>
             <a:endParaRPr lang="en-US"/>
           </a:p>
@@ -7159,14 +7159,14 @@
             <a:pPr lvl="1"/>
             <a:r>
               <a:rPr lang="en-US" dirty="0"/>
-              <a:t>TIP 31 or122 NPN</a:t>
+              <a:t>TIP 122 NPN</a:t>
             </a:r>
           </a:p>
           <a:p>
             <a:pPr lvl="1"/>
             <a:r>
               <a:rPr lang="en-US" dirty="0"/>
-              <a:t>TIP 32 or 127 PNP</a:t>
+              <a:t>TIP 127 PNP</a:t>
             </a:r>
           </a:p>
           <a:p>
@@ -7187,10 +7187,10 @@
       </p:sp>
       <p:pic>
         <p:nvPicPr>
-          <p:cNvPr id="4" name="Picture 3">
+          <p:cNvPr id="7" name="Picture 6">
             <a:extLst>
               <a:ext uri="{FF2B5EF4-FFF2-40B4-BE49-F238E27FC236}">
-                <a16:creationId xmlns:a16="http://schemas.microsoft.com/office/drawing/2014/main" id="{3A119A39-9845-13B7-A29C-A7DDB01B12D1}"/>
+                <a16:creationId xmlns:a16="http://schemas.microsoft.com/office/drawing/2014/main" id="{433E35C6-D05F-01C8-1541-18C08A44A7DA}"/>
               </a:ext>
             </a:extLst>
           </p:cNvPr>
@@ -7214,8 +7214,8 @@
         </p:blipFill>
         <p:spPr bwMode="auto">
           <a:xfrm>
-            <a:off x="5544017" y="609882"/>
-            <a:ext cx="6538055" cy="5285219"/>
+            <a:off x="4988666" y="574675"/>
+            <a:ext cx="6159525" cy="5191125"/>
           </a:xfrm>
           <a:prstGeom prst="rect">
             <a:avLst/>
